--- a/Actividad 5.2Reporte de practica_YoselinEscobedo_PW_8ISCM.pptx
+++ b/Actividad 5.2Reporte de practica_YoselinEscobedo_PW_8ISCM.pptx
@@ -221,7 +221,7 @@
           <a:p>
             <a:fld id="{AE0ECA8B-AAB0-428D-BCFC-BE9A649E3CE4}" type="datetimeFigureOut">
               <a:rPr lang="es-MX" smtClean="0"/>
-              <a:t>12/06/2026</a:t>
+              <a:t>15/06/2026</a:t>
             </a:fld>
             <a:endParaRPr lang="es-MX"/>
           </a:p>
@@ -638,7 +638,7 @@
           <a:p>
             <a:fld id="{E14B537E-B39D-4427-A890-3F8B973B0B77}" type="datetime1">
               <a:rPr lang="es-MX" smtClean="0"/>
-              <a:t>12/06/2026</a:t>
+              <a:t>15/06/2026</a:t>
             </a:fld>
             <a:endParaRPr lang="es-MX"/>
           </a:p>
@@ -838,7 +838,7 @@
           <a:p>
             <a:fld id="{5EE24AF0-0005-419E-B0C4-CC65885AB75E}" type="datetime1">
               <a:rPr lang="es-MX" smtClean="0"/>
-              <a:t>12/06/2026</a:t>
+              <a:t>15/06/2026</a:t>
             </a:fld>
             <a:endParaRPr lang="es-MX"/>
           </a:p>
@@ -1048,7 +1048,7 @@
           <a:p>
             <a:fld id="{20630822-2C10-47C7-AF9C-AF3EA88223C9}" type="datetime1">
               <a:rPr lang="es-MX" smtClean="0"/>
-              <a:t>12/06/2026</a:t>
+              <a:t>15/06/2026</a:t>
             </a:fld>
             <a:endParaRPr lang="es-MX"/>
           </a:p>
@@ -1270,7 +1270,7 @@
           <a:p>
             <a:fld id="{D77915CB-2684-4AD9-B52B-C929763090CA}" type="datetime1">
               <a:rPr lang="es-MX" smtClean="0"/>
-              <a:t>12/06/2026</a:t>
+              <a:t>15/06/2026</a:t>
             </a:fld>
             <a:endParaRPr lang="es-MX"/>
           </a:p>
@@ -1470,7 +1470,7 @@
           <a:p>
             <a:fld id="{CC66BEDB-3A64-4BD9-937C-92C35E747F6B}" type="datetime1">
               <a:rPr lang="es-MX" smtClean="0"/>
-              <a:t>12/06/2026</a:t>
+              <a:t>15/06/2026</a:t>
             </a:fld>
             <a:endParaRPr lang="es-MX"/>
           </a:p>
@@ -1746,7 +1746,7 @@
           <a:p>
             <a:fld id="{7867856E-A756-49D7-9127-08A5FEE39B11}" type="datetime1">
               <a:rPr lang="es-MX" smtClean="0"/>
-              <a:t>12/06/2026</a:t>
+              <a:t>15/06/2026</a:t>
             </a:fld>
             <a:endParaRPr lang="es-MX"/>
           </a:p>
@@ -2014,7 +2014,7 @@
           <a:p>
             <a:fld id="{0F0D400F-7146-497B-9B9A-15172F13A02D}" type="datetime1">
               <a:rPr lang="es-MX" smtClean="0"/>
-              <a:t>12/06/2026</a:t>
+              <a:t>15/06/2026</a:t>
             </a:fld>
             <a:endParaRPr lang="es-MX"/>
           </a:p>
@@ -2429,7 +2429,7 @@
           <a:p>
             <a:fld id="{FDBB07ED-6A46-4EC5-8D31-AF5325EB791E}" type="datetime1">
               <a:rPr lang="es-MX" smtClean="0"/>
-              <a:t>12/06/2026</a:t>
+              <a:t>15/06/2026</a:t>
             </a:fld>
             <a:endParaRPr lang="es-MX"/>
           </a:p>
@@ -2571,7 +2571,7 @@
           <a:p>
             <a:fld id="{E8E6EC20-398A-4F8E-8907-91BEED6CE050}" type="datetime1">
               <a:rPr lang="es-MX" smtClean="0"/>
-              <a:t>12/06/2026</a:t>
+              <a:t>15/06/2026</a:t>
             </a:fld>
             <a:endParaRPr lang="es-MX"/>
           </a:p>
@@ -2684,7 +2684,7 @@
           <a:p>
             <a:fld id="{96403480-F7FA-4694-86FE-8DD7AB8AAB4D}" type="datetime1">
               <a:rPr lang="es-MX" smtClean="0"/>
-              <a:t>12/06/2026</a:t>
+              <a:t>15/06/2026</a:t>
             </a:fld>
             <a:endParaRPr lang="es-MX"/>
           </a:p>
@@ -2997,7 +2997,7 @@
           <a:p>
             <a:fld id="{248DDF87-7080-4D04-88C8-317B64B148B7}" type="datetime1">
               <a:rPr lang="es-MX" smtClean="0"/>
-              <a:t>12/06/2026</a:t>
+              <a:t>15/06/2026</a:t>
             </a:fld>
             <a:endParaRPr lang="es-MX"/>
           </a:p>
@@ -3197,7 +3197,7 @@
           <a:p>
             <a:fld id="{219C674B-F136-4572-AF79-42159E60014E}" type="datetime1">
               <a:rPr lang="es-MX" smtClean="0"/>
-              <a:t>12/06/2026</a:t>
+              <a:t>15/06/2026</a:t>
             </a:fld>
             <a:endParaRPr lang="es-MX"/>
           </a:p>
@@ -3486,7 +3486,7 @@
           <a:p>
             <a:fld id="{7F486D58-5117-4B8F-8500-5045B431E6C2}" type="datetime1">
               <a:rPr lang="es-MX" smtClean="0"/>
-              <a:t>12/06/2026</a:t>
+              <a:t>15/06/2026</a:t>
             </a:fld>
             <a:endParaRPr lang="es-MX"/>
           </a:p>
@@ -3686,7 +3686,7 @@
           <a:p>
             <a:fld id="{DB46EEC1-3A40-4E7C-B91C-34BA995EDB68}" type="datetime1">
               <a:rPr lang="es-MX" smtClean="0"/>
-              <a:t>12/06/2026</a:t>
+              <a:t>15/06/2026</a:t>
             </a:fld>
             <a:endParaRPr lang="es-MX"/>
           </a:p>
@@ -3896,7 +3896,7 @@
           <a:p>
             <a:fld id="{9D9868A7-8A19-46D4-88B4-1A35902D5A54}" type="datetime1">
               <a:rPr lang="es-MX" smtClean="0"/>
-              <a:t>12/06/2026</a:t>
+              <a:t>15/06/2026</a:t>
             </a:fld>
             <a:endParaRPr lang="es-MX"/>
           </a:p>
@@ -4172,7 +4172,7 @@
           <a:p>
             <a:fld id="{7291FA42-EF22-4087-9D68-2CCC427E1B8D}" type="datetime1">
               <a:rPr lang="es-MX" smtClean="0"/>
-              <a:t>12/06/2026</a:t>
+              <a:t>15/06/2026</a:t>
             </a:fld>
             <a:endParaRPr lang="es-MX"/>
           </a:p>
@@ -4440,7 +4440,7 @@
           <a:p>
             <a:fld id="{C7C65C5F-055C-49A2-BAD7-3467F05F5140}" type="datetime1">
               <a:rPr lang="es-MX" smtClean="0"/>
-              <a:t>12/06/2026</a:t>
+              <a:t>15/06/2026</a:t>
             </a:fld>
             <a:endParaRPr lang="es-MX"/>
           </a:p>
@@ -4855,7 +4855,7 @@
           <a:p>
             <a:fld id="{DD1D2DFC-4CC7-4D74-9450-23E75288A023}" type="datetime1">
               <a:rPr lang="es-MX" smtClean="0"/>
-              <a:t>12/06/2026</a:t>
+              <a:t>15/06/2026</a:t>
             </a:fld>
             <a:endParaRPr lang="es-MX"/>
           </a:p>
@@ -4997,7 +4997,7 @@
           <a:p>
             <a:fld id="{A9FC013D-2796-4893-9007-ED0E1FF4EF2A}" type="datetime1">
               <a:rPr lang="es-MX" smtClean="0"/>
-              <a:t>12/06/2026</a:t>
+              <a:t>15/06/2026</a:t>
             </a:fld>
             <a:endParaRPr lang="es-MX"/>
           </a:p>
@@ -5110,7 +5110,7 @@
           <a:p>
             <a:fld id="{46757A3B-3841-4140-86B1-9D8E15DF119B}" type="datetime1">
               <a:rPr lang="es-MX" smtClean="0"/>
-              <a:t>12/06/2026</a:t>
+              <a:t>15/06/2026</a:t>
             </a:fld>
             <a:endParaRPr lang="es-MX"/>
           </a:p>
@@ -5423,7 +5423,7 @@
           <a:p>
             <a:fld id="{65C7B3F9-4A39-4460-8EB3-980838FD8B3B}" type="datetime1">
               <a:rPr lang="es-MX" smtClean="0"/>
-              <a:t>12/06/2026</a:t>
+              <a:t>15/06/2026</a:t>
             </a:fld>
             <a:endParaRPr lang="es-MX"/>
           </a:p>
@@ -5712,7 +5712,7 @@
           <a:p>
             <a:fld id="{CE405E11-B2F0-47CD-8E73-8C8EFEA5DDE4}" type="datetime1">
               <a:rPr lang="es-MX" smtClean="0"/>
-              <a:t>12/06/2026</a:t>
+              <a:t>15/06/2026</a:t>
             </a:fld>
             <a:endParaRPr lang="es-MX"/>
           </a:p>
@@ -5955,7 +5955,7 @@
           <a:p>
             <a:fld id="{D6EC8C28-4E43-4B30-99F9-ADAAAD40CBD2}" type="datetime1">
               <a:rPr lang="es-MX" smtClean="0"/>
-              <a:t>12/06/2026</a:t>
+              <a:t>15/06/2026</a:t>
             </a:fld>
             <a:endParaRPr lang="es-MX"/>
           </a:p>
@@ -6526,7 +6526,7 @@
           <a:p>
             <a:fld id="{24A7DDD1-9F77-4F12-BA00-45107A5EA290}" type="datetime1">
               <a:rPr lang="es-MX" smtClean="0"/>
-              <a:t>12/06/2026</a:t>
+              <a:t>15/06/2026</a:t>
             </a:fld>
             <a:endParaRPr lang="es-MX"/>
           </a:p>
@@ -14521,7 +14521,7 @@
         <p:spPr>
           <a:xfrm>
             <a:off x="1690407" y="887842"/>
-            <a:ext cx="8811185" cy="3365024"/>
+            <a:ext cx="8811185" cy="2949525"/>
           </a:xfrm>
           <a:prstGeom prst="rect">
             <a:avLst/>
@@ -14552,7 +14552,7 @@
               <a:defRPr/>
             </a:pPr>
             <a:r>
-              <a:rPr lang="es-ES" dirty="0">
+              <a:rPr lang="es-ES">
                 <a:solidFill>
                   <a:prstClr val="black"/>
                 </a:solidFill>
@@ -14560,29 +14560,7 @@
                 <a:ea typeface="Aptos" panose="020B0004020202020204" pitchFamily="34" charset="0"/>
                 <a:cs typeface="Arial" panose="020B0604020202020204" pitchFamily="34" charset="0"/>
               </a:rPr>
-              <a:t>Anexo carpeta que contiene el código fuente correspondiente a este avance “</a:t>
-            </a:r>
-            <a:r>
-              <a:rPr lang="es-ES" dirty="0" err="1">
-                <a:solidFill>
-                  <a:prstClr val="black"/>
-                </a:solidFill>
-                <a:latin typeface="Arial" panose="020B0604020202020204" pitchFamily="34" charset="0"/>
-                <a:ea typeface="Aptos" panose="020B0004020202020204" pitchFamily="34" charset="0"/>
-                <a:cs typeface="Arial" panose="020B0604020202020204" pitchFamily="34" charset="0"/>
-              </a:rPr>
-              <a:t>Proyecto_angular</a:t>
-            </a:r>
-            <a:r>
-              <a:rPr lang="es-ES" dirty="0">
-                <a:solidFill>
-                  <a:prstClr val="black"/>
-                </a:solidFill>
-                <a:latin typeface="Arial" panose="020B0604020202020204" pitchFamily="34" charset="0"/>
-                <a:ea typeface="Aptos" panose="020B0004020202020204" pitchFamily="34" charset="0"/>
-                <a:cs typeface="Arial" panose="020B0604020202020204" pitchFamily="34" charset="0"/>
-              </a:rPr>
-              <a:t>”</a:t>
+              <a:t>Anexo enlace a Git: https://github.com/yoselinescobedolopez/PW-Tema-5.git</a:t>
             </a:r>
             <a:endParaRPr kumimoji="0" lang="es-ES" sz="1800" b="0" i="0" u="none" strike="noStrike" kern="1200" cap="none" spc="0" normalizeH="0" baseline="0" noProof="0" dirty="0">
               <a:ln>
